--- a/assets/pptx/catalog-684.pptx
+++ b/assets/pptx/catalog-684.pptx
@@ -3282,7 +3282,7 @@
                 <a:ea typeface="Ebrima"/>
                 <a:cs typeface="Ebrima"/>
               </a:rPr>
-              <a:t>ክብሬ (7x)</a:t>
+              <a:t>ክብሬ 7x</a:t>
             </a:r>
           </a:p>
           <a:p>
@@ -3439,7 +3439,7 @@
                 <a:ea typeface="Ebrima"/>
                 <a:cs typeface="Ebrima"/>
               </a:rPr>
-              <a:t>የኢየሱሴን ደም አይቶ (2x)</a:t>
+              <a:t>የኢየሱሴን ደም አይቶ 2x</a:t>
             </a:r>
           </a:p>
           <a:p>
@@ -3560,7 +3560,7 @@
                 <a:ea typeface="Ebrima"/>
                 <a:cs typeface="Ebrima"/>
               </a:rPr>
-              <a:t>ተሸፍኛለሁ አያገኘኝ (2x)</a:t>
+              <a:t>ተሸፍኛለሁ አያገኘኝ 2x</a:t>
             </a:r>
           </a:p>
           <a:p>
@@ -3596,7 +3596,7 @@
                 <a:ea typeface="Ebrima"/>
                 <a:cs typeface="Ebrima"/>
               </a:rPr>
-              <a:t>ያን ቅጥር አልፎ እንዴት ይገባል (2x)</a:t>
+              <a:t>ያን ቅጥር አልፎ እንዴት ይገባል 2x</a:t>
             </a:r>
           </a:p>
         </p:txBody>
@@ -3717,7 +3717,7 @@
                 <a:ea typeface="Ebrima"/>
                 <a:cs typeface="Ebrima"/>
               </a:rPr>
-              <a:t>ፍፁም መቅረብ አይችልም ከደሙ የተነሳ (2x)</a:t>
+              <a:t>ፍፁም መቅረብ አይችልም ከደሙ የተነሳ 2x</a:t>
             </a:r>
           </a:p>
         </p:txBody>
@@ -3856,7 +3856,7 @@
                 <a:ea typeface="Ebrima"/>
                 <a:cs typeface="Ebrima"/>
               </a:rPr>
-              <a:t>የኢየሱሴን ደም አይቶ (2x)</a:t>
+              <a:t>የኢየሱሴን ደም አይቶ 2x</a:t>
             </a:r>
           </a:p>
           <a:p>
@@ -3995,7 +3995,7 @@
                 <a:ea typeface="Ebrima"/>
                 <a:cs typeface="Ebrima"/>
               </a:rPr>
-              <a:t>ክብሬ (7x)</a:t>
+              <a:t>ክብሬ 7x</a:t>
             </a:r>
           </a:p>
           <a:p>
